--- a/作业/交付物/PPT/答辩PPT.pptx
+++ b/作业/交付物/PPT/答辩PPT.pptx
@@ -3255,7 +3255,7 @@
               </a:defRPr>
             </a:pPr>
             <a:r>
-              <a:t>小组：实训第X组</a:t>
+              <a:t>小组：实训第4组</a:t>
             </a:r>
           </a:p>
           <a:p>
@@ -8296,7 +8296,7 @@
               </a:defRPr>
             </a:pPr>
             <a:r>
-              <a:t>小组：第X组    |    王振光    胡翰斌    刘永涛    王浩乐</a:t>
+              <a:t>小组：第4组    |    王振光    胡翰斌    刘永涛    王浩乐</a:t>
             </a:r>
           </a:p>
         </p:txBody>
